--- a/docs/strategy/2026-06-11_strategy_review.pptx
+++ b/docs/strategy/2026-06-11_strategy_review.pptx
@@ -3404,7 +3404,7 @@
                 </a:solidFill>
                 <a:latin typeface="Calibri"/>
               </a:rPr>
-              <a:t>RHAISTRAT-1471  ·  Critical  ·  Forge  ·  3.5  ·  In Progress — 0 active engineering issues</a:t>
+              <a:t>RHAISTRAT-1471  ·  Critical  ·  Forge  ·  3.5  ·  In Progress</a:t>
             </a:r>
           </a:p>
         </p:txBody>
@@ -3774,7 +3774,7 @@
                 </a:solidFill>
                 <a:latin typeface="Calibri"/>
               </a:rPr>
-              <a:t>RHAISTRAT-1470  ·  Major  ·  Forge  ·  3.5  ·  In Progress — 2 backlog AICP issues</a:t>
+              <a:t>RHAISTRAT-1470  ·  Major  ·  Forge  ·  3.5  ·  In Progress — 3 AICP issues (2 in progress)</a:t>
             </a:r>
           </a:p>
         </p:txBody>
@@ -4135,7 +4135,7 @@
                 </a:solidFill>
                 <a:latin typeface="Calibri"/>
               </a:rPr>
-              <a:t>RHAISTRAT-1519  ·  Heimdall  ·  3.5  ·  In Progress — 9 supporting RHOAIENG issues</a:t>
+              <a:t>RHAISTRAT-1519  ·  Blocker  ·  Heimdall  ·  3.5  ·  In Progress — 19 supporting RHOAIENG issues</a:t>
             </a:r>
           </a:p>
         </p:txBody>
@@ -4546,7 +4546,7 @@
                 </a:solidFill>
                 <a:latin typeface="Calibri"/>
               </a:rPr>
-              <a:t>RHAISTRAT-1471 is Critical for 3.5 with zero active engineering. Need team capacity assigned to Forge to begin scope definition and delivery this sprint.</a:t>
+              <a:t>RHAISTRAT-1471 is Critical for 3.5, status: In Progress. Need team capacity assigned to Forge to begin scope definition and delivery.</a:t>
             </a:r>
           </a:p>
           <a:p>
@@ -4571,7 +4571,7 @@
                 </a:solidFill>
                 <a:latin typeface="Calibri"/>
               </a:rPr>
-              <a:t>RHAISTRAT-1470 is In Progress strategically but only 2 backlog issues exist in AICP. Need engineering investment aligned to product priority — GPUaaS UX vision is already moving.</a:t>
+              <a:t>RHAISTRAT-1470 is In Progress strategically but only 3 AICP issues exist (2 in progress). Need engineering investment aligned to product priority.</a:t>
             </a:r>
           </a:p>
           <a:p>
@@ -4596,7 +4596,7 @@
                 </a:solidFill>
                 <a:latin typeface="Calibri"/>
               </a:rPr>
-              <a:t>RHAISTRAT-1519 (Heimdall) requires cluster provisioning infrastructure to run the upgrade matrix in CI. 19 supporting issues in flight — need platform/infra support.</a:t>
+              <a:t>RHAISTRAT-1519 (Blocker, Heimdall) requires cluster provisioning infrastructure to run the upgrade matrix in CI. 19 supporting issues open — need platform/infra support.</a:t>
             </a:r>
           </a:p>
           <a:p>
@@ -4621,7 +4621,7 @@
                 </a:solidFill>
                 <a:latin typeface="Calibri"/>
               </a:rPr>
-              <a:t>6 blocker-priority and 65 critical issues remain open across AICP. Top: xKS operator CrashLoopBackOff (RHOAIENG-67048), LLM-D Batch Gateway integration (RHOAIENG-63970/63964), FIPS compliance (RHOAIENG-63211).</a:t>
+              <a:t>7 blocker-priority and 65 critical issues remain open across AICP. Top: RHOAIENG-67051 (kube-auth-proxy: replace sync.Once with retry), RHOAIENG-67048 (rhai-operator CrashLoopBackOff on xKS — missi), RHOAIENG-65210 (Disabled Kueue validating webhook in next 2.2).</a:t>
             </a:r>
           </a:p>
           <a:p>
